--- a/lecons/LSA/Hydrology/04_LSA_HYDRO_L25_How_Human_Activities_Affect_the_Hydrological_Cycle.pptx
+++ b/lecons/LSA/Hydrology/04_LSA_HYDRO_L25_How_Human_Activities_Affect_the_Hydrological_Cycle.pptx
@@ -13777,7 +13777,7 @@
               <a:buNone/>
             </a:pPr>
             <a:r>
-              <a:rPr lang="en-US" sz="4000" b="1" dirty="0">
+              <a:rPr lang="en-US" sz="3200" b="1" dirty="0">
                 <a:solidFill>
                   <a:srgbClr val="111111"/>
                 </a:solidFill>
@@ -13787,7 +13787,7 @@
               </a:rPr>
               <a:t>Topic: Global Water in Storage and Circulation</a:t>
             </a:r>
-            <a:endParaRPr lang="en-US" sz="4000" dirty="0"/>
+            <a:endParaRPr lang="en-US" sz="3200" dirty="0"/>
           </a:p>
           <a:p>
             <a:pPr algn="l" indent="0" marL="0">
@@ -13797,7 +13797,7 @@
               <a:buNone/>
             </a:pPr>
             <a:r>
-              <a:rPr lang="en-US" sz="4000" b="1" dirty="0">
+              <a:rPr lang="en-US" sz="3200" b="1" dirty="0">
                 <a:solidFill>
                   <a:srgbClr val="111111"/>
                 </a:solidFill>
@@ -13807,7 +13807,7 @@
               </a:rPr>
               <a:t>Sub-topic: Man and the Hydrological Cycle</a:t>
             </a:r>
-            <a:endParaRPr lang="en-US" sz="4000" dirty="0"/>
+            <a:endParaRPr lang="en-US" sz="3200" dirty="0"/>
           </a:p>
           <a:p>
             <a:pPr algn="l" indent="0" marL="0">
@@ -13817,7 +13817,7 @@
               <a:buNone/>
             </a:pPr>
             <a:r>
-              <a:rPr lang="en-US" sz="4000" b="1" dirty="0">
+              <a:rPr lang="en-US" sz="3200" b="1" dirty="0">
                 <a:solidFill>
                   <a:srgbClr val="990011"/>
                 </a:solidFill>
@@ -13827,7 +13827,7 @@
               </a:rPr>
               <a:t>Lesson 25: How Human Activities Affect the Hydrological Cycle</a:t>
             </a:r>
-            <a:endParaRPr lang="en-US" sz="4000" dirty="0"/>
+            <a:endParaRPr lang="en-US" sz="3200" dirty="0"/>
           </a:p>
         </p:txBody>
       </p:sp>
